--- a/Final_Internal_PPT.pptx
+++ b/Final_Internal_PPT.pptx
@@ -5,7 +5,7 @@
     <p:sldMasterId id="2147483648" r:id="rId1"/>
   </p:sldMasterIdLst>
   <p:notesMasterIdLst>
-    <p:notesMasterId r:id="rId28"/>
+    <p:notesMasterId r:id="rId29"/>
   </p:notesMasterIdLst>
   <p:sldIdLst>
     <p:sldId id="297" r:id="rId2"/>
@@ -30,10 +30,11 @@
     <p:sldId id="326" r:id="rId21"/>
     <p:sldId id="334" r:id="rId22"/>
     <p:sldId id="335" r:id="rId23"/>
-    <p:sldId id="317" r:id="rId24"/>
-    <p:sldId id="331" r:id="rId25"/>
-    <p:sldId id="319" r:id="rId26"/>
-    <p:sldId id="320" r:id="rId27"/>
+    <p:sldId id="337" r:id="rId24"/>
+    <p:sldId id="317" r:id="rId25"/>
+    <p:sldId id="331" r:id="rId26"/>
+    <p:sldId id="319" r:id="rId27"/>
+    <p:sldId id="320" r:id="rId28"/>
   </p:sldIdLst>
   <p:sldSz cx="12192000" cy="6858000"/>
   <p:notesSz cx="6858000" cy="9144000"/>
@@ -7686,7 +7687,7 @@
         </p:nvSpPr>
         <p:spPr>
           <a:xfrm>
-            <a:off x="3177540" y="3157315"/>
+            <a:off x="3323844" y="3157315"/>
             <a:ext cx="6775704" cy="369332"/>
           </a:xfrm>
           <a:prstGeom prst="rect">
@@ -8189,7 +8190,7 @@
         </p:nvSpPr>
         <p:spPr>
           <a:xfrm>
-            <a:off x="2703576" y="273685"/>
+            <a:off x="3051048" y="-220091"/>
             <a:ext cx="10515600" cy="1325563"/>
           </a:xfrm>
         </p:spPr>
@@ -8201,6 +8202,150 @@
               <a:rPr lang="en-IN" dirty="0"/>
               <a:t>RESULTS AND ANALYSIS</a:t>
             </a:r>
+          </a:p>
+        </p:txBody>
+      </p:sp>
+      <p:pic>
+        <p:nvPicPr>
+          <p:cNvPr id="12" name="Picture 11">
+            <a:extLst>
+              <a:ext uri="{FF2B5EF4-FFF2-40B4-BE49-F238E27FC236}">
+                <a16:creationId xmlns:a16="http://schemas.microsoft.com/office/drawing/2014/main" id="{925473F4-D07E-381A-5726-DF06C3F50A93}"/>
+              </a:ext>
+            </a:extLst>
+          </p:cNvPr>
+          <p:cNvPicPr>
+            <a:picLocks noChangeAspect="1"/>
+          </p:cNvPicPr>
+          <p:nvPr/>
+        </p:nvPicPr>
+        <p:blipFill>
+          <a:blip r:embed="rId2">
+            <a:extLst>
+              <a:ext uri="{28A0092B-C50C-407E-A947-70E740481C1C}">
+                <a14:useLocalDpi xmlns:a14="http://schemas.microsoft.com/office/drawing/2010/main" val="0"/>
+              </a:ext>
+            </a:extLst>
+          </a:blip>
+          <a:stretch>
+            <a:fillRect/>
+          </a:stretch>
+        </p:blipFill>
+        <p:spPr>
+          <a:xfrm>
+            <a:off x="250524" y="791223"/>
+            <a:ext cx="5845476" cy="2963972"/>
+          </a:xfrm>
+          <a:prstGeom prst="rect">
+            <a:avLst/>
+          </a:prstGeom>
+        </p:spPr>
+      </p:pic>
+      <p:pic>
+        <p:nvPicPr>
+          <p:cNvPr id="14" name="Picture 13">
+            <a:extLst>
+              <a:ext uri="{FF2B5EF4-FFF2-40B4-BE49-F238E27FC236}">
+                <a16:creationId xmlns:a16="http://schemas.microsoft.com/office/drawing/2014/main" id="{2E535552-04B3-C438-7D48-1279CCF868D9}"/>
+              </a:ext>
+            </a:extLst>
+          </p:cNvPr>
+          <p:cNvPicPr>
+            <a:picLocks noChangeAspect="1"/>
+          </p:cNvPicPr>
+          <p:nvPr/>
+        </p:nvPicPr>
+        <p:blipFill>
+          <a:blip r:embed="rId3">
+            <a:extLst>
+              <a:ext uri="{28A0092B-C50C-407E-A947-70E740481C1C}">
+                <a14:useLocalDpi xmlns:a14="http://schemas.microsoft.com/office/drawing/2010/main" val="0"/>
+              </a:ext>
+            </a:extLst>
+          </a:blip>
+          <a:stretch>
+            <a:fillRect/>
+          </a:stretch>
+        </p:blipFill>
+        <p:spPr>
+          <a:xfrm>
+            <a:off x="5517547" y="3581459"/>
+            <a:ext cx="6551144" cy="3158754"/>
+          </a:xfrm>
+          <a:prstGeom prst="rect">
+            <a:avLst/>
+          </a:prstGeom>
+        </p:spPr>
+      </p:pic>
+      <p:sp>
+        <p:nvSpPr>
+          <p:cNvPr id="16" name="TextBox 15">
+            <a:extLst>
+              <a:ext uri="{FF2B5EF4-FFF2-40B4-BE49-F238E27FC236}">
+                <a16:creationId xmlns:a16="http://schemas.microsoft.com/office/drawing/2014/main" id="{755B1208-FEDD-73BA-9613-052632DF857D}"/>
+              </a:ext>
+            </a:extLst>
+          </p:cNvPr>
+          <p:cNvSpPr txBox="1"/>
+          <p:nvPr/>
+        </p:nvSpPr>
+        <p:spPr>
+          <a:xfrm>
+            <a:off x="7075237" y="1697134"/>
+            <a:ext cx="4014216" cy="369332"/>
+          </a:xfrm>
+          <a:prstGeom prst="rect">
+            <a:avLst/>
+          </a:prstGeom>
+          <a:noFill/>
+        </p:spPr>
+        <p:txBody>
+          <a:bodyPr wrap="square">
+            <a:spAutoFit/>
+          </a:bodyPr>
+          <a:lstStyle/>
+          <a:p>
+            <a:r>
+              <a:rPr lang="en-US" dirty="0"/>
+              <a:t>Figure 1: Resume parsing interface</a:t>
+            </a:r>
+            <a:endParaRPr lang="en-IN" dirty="0"/>
+          </a:p>
+        </p:txBody>
+      </p:sp>
+      <p:sp>
+        <p:nvSpPr>
+          <p:cNvPr id="18" name="TextBox 17">
+            <a:extLst>
+              <a:ext uri="{FF2B5EF4-FFF2-40B4-BE49-F238E27FC236}">
+                <a16:creationId xmlns:a16="http://schemas.microsoft.com/office/drawing/2014/main" id="{1C6B944F-50F2-36E8-2CE8-675DF91A772B}"/>
+              </a:ext>
+            </a:extLst>
+          </p:cNvPr>
+          <p:cNvSpPr txBox="1"/>
+          <p:nvPr/>
+        </p:nvSpPr>
+        <p:spPr>
+          <a:xfrm>
+            <a:off x="1080516" y="4766509"/>
+            <a:ext cx="3941064" cy="646331"/>
+          </a:xfrm>
+          <a:prstGeom prst="rect">
+            <a:avLst/>
+          </a:prstGeom>
+          <a:noFill/>
+        </p:spPr>
+        <p:txBody>
+          <a:bodyPr wrap="square">
+            <a:spAutoFit/>
+          </a:bodyPr>
+          <a:lstStyle/>
+          <a:p>
+            <a:r>
+              <a:rPr lang="en-US" dirty="0"/>
+              <a:t>Figure 2: Uploading  resume for parsing </a:t>
+            </a:r>
+            <a:endParaRPr lang="en-IN" dirty="0"/>
           </a:p>
         </p:txBody>
       </p:sp>
@@ -8236,6 +8381,214 @@
       </p:grpSpPr>
       <p:sp>
         <p:nvSpPr>
+          <p:cNvPr id="2" name="Title 1">
+            <a:extLst>
+              <a:ext uri="{FF2B5EF4-FFF2-40B4-BE49-F238E27FC236}">
+                <a16:creationId xmlns:a16="http://schemas.microsoft.com/office/drawing/2014/main" id="{C21F8465-19DF-E531-2303-6F7F6ECBAC6C}"/>
+              </a:ext>
+            </a:extLst>
+          </p:cNvPr>
+          <p:cNvSpPr>
+            <a:spLocks noGrp="1"/>
+          </p:cNvSpPr>
+          <p:nvPr>
+            <p:ph type="title"/>
+          </p:nvPr>
+        </p:nvSpPr>
+        <p:spPr>
+          <a:xfrm>
+            <a:off x="3135086" y="-193449"/>
+            <a:ext cx="10515600" cy="1325563"/>
+          </a:xfrm>
+        </p:spPr>
+        <p:txBody>
+          <a:bodyPr/>
+          <a:lstStyle/>
+          <a:p>
+            <a:r>
+              <a:rPr lang="en-US" dirty="0"/>
+              <a:t>RESULTS AND ANALYSIS</a:t>
+            </a:r>
+            <a:endParaRPr lang="en-IN" dirty="0"/>
+          </a:p>
+        </p:txBody>
+      </p:sp>
+      <p:pic>
+        <p:nvPicPr>
+          <p:cNvPr id="4" name="Picture 3">
+            <a:extLst>
+              <a:ext uri="{FF2B5EF4-FFF2-40B4-BE49-F238E27FC236}">
+                <a16:creationId xmlns:a16="http://schemas.microsoft.com/office/drawing/2014/main" id="{1BF235F0-118D-1E51-8D2F-72C1C7A80B0C}"/>
+              </a:ext>
+            </a:extLst>
+          </p:cNvPr>
+          <p:cNvPicPr>
+            <a:picLocks noChangeAspect="1"/>
+          </p:cNvPicPr>
+          <p:nvPr/>
+        </p:nvPicPr>
+        <p:blipFill>
+          <a:blip r:embed="rId2">
+            <a:extLst>
+              <a:ext uri="{28A0092B-C50C-407E-A947-70E740481C1C}">
+                <a14:useLocalDpi xmlns:a14="http://schemas.microsoft.com/office/drawing/2010/main" val="0"/>
+              </a:ext>
+            </a:extLst>
+          </a:blip>
+          <a:stretch>
+            <a:fillRect/>
+          </a:stretch>
+        </p:blipFill>
+        <p:spPr>
+          <a:xfrm>
+            <a:off x="337338" y="811321"/>
+            <a:ext cx="5758662" cy="3091543"/>
+          </a:xfrm>
+          <a:prstGeom prst="rect">
+            <a:avLst/>
+          </a:prstGeom>
+        </p:spPr>
+      </p:pic>
+      <p:pic>
+        <p:nvPicPr>
+          <p:cNvPr id="6" name="Picture 5">
+            <a:extLst>
+              <a:ext uri="{FF2B5EF4-FFF2-40B4-BE49-F238E27FC236}">
+                <a16:creationId xmlns:a16="http://schemas.microsoft.com/office/drawing/2014/main" id="{378B37F0-5320-34C5-5851-8A07BB291755}"/>
+              </a:ext>
+            </a:extLst>
+          </p:cNvPr>
+          <p:cNvPicPr>
+            <a:picLocks noChangeAspect="1"/>
+          </p:cNvPicPr>
+          <p:nvPr/>
+        </p:nvPicPr>
+        <p:blipFill>
+          <a:blip r:embed="rId3">
+            <a:extLst>
+              <a:ext uri="{28A0092B-C50C-407E-A947-70E740481C1C}">
+                <a14:useLocalDpi xmlns:a14="http://schemas.microsoft.com/office/drawing/2010/main" val="0"/>
+              </a:ext>
+            </a:extLst>
+          </a:blip>
+          <a:stretch>
+            <a:fillRect/>
+          </a:stretch>
+        </p:blipFill>
+        <p:spPr>
+          <a:xfrm>
+            <a:off x="6349838" y="2137943"/>
+            <a:ext cx="5504824" cy="4720057"/>
+          </a:xfrm>
+          <a:prstGeom prst="rect">
+            <a:avLst/>
+          </a:prstGeom>
+        </p:spPr>
+      </p:pic>
+      <p:sp>
+        <p:nvSpPr>
+          <p:cNvPr id="8" name="TextBox 7">
+            <a:extLst>
+              <a:ext uri="{FF2B5EF4-FFF2-40B4-BE49-F238E27FC236}">
+                <a16:creationId xmlns:a16="http://schemas.microsoft.com/office/drawing/2014/main" id="{1A72FF4C-89C3-8618-B386-2CFD81D3F693}"/>
+              </a:ext>
+            </a:extLst>
+          </p:cNvPr>
+          <p:cNvSpPr txBox="1"/>
+          <p:nvPr/>
+        </p:nvSpPr>
+        <p:spPr>
+          <a:xfrm>
+            <a:off x="6604254" y="1132114"/>
+            <a:ext cx="4716018" cy="369332"/>
+          </a:xfrm>
+          <a:prstGeom prst="rect">
+            <a:avLst/>
+          </a:prstGeom>
+          <a:noFill/>
+        </p:spPr>
+        <p:txBody>
+          <a:bodyPr wrap="square">
+            <a:spAutoFit/>
+          </a:bodyPr>
+          <a:lstStyle/>
+          <a:p>
+            <a:r>
+              <a:rPr lang="en-US" dirty="0"/>
+              <a:t>Figure 3: Interface after uploading resume</a:t>
+            </a:r>
+            <a:endParaRPr lang="en-IN" dirty="0"/>
+          </a:p>
+        </p:txBody>
+      </p:sp>
+      <p:sp>
+        <p:nvSpPr>
+          <p:cNvPr id="10" name="TextBox 9">
+            <a:extLst>
+              <a:ext uri="{FF2B5EF4-FFF2-40B4-BE49-F238E27FC236}">
+                <a16:creationId xmlns:a16="http://schemas.microsoft.com/office/drawing/2014/main" id="{EF4AE803-03C0-7D6D-FAE7-A3C2CBB0CEA0}"/>
+              </a:ext>
+            </a:extLst>
+          </p:cNvPr>
+          <p:cNvSpPr txBox="1"/>
+          <p:nvPr/>
+        </p:nvSpPr>
+        <p:spPr>
+          <a:xfrm>
+            <a:off x="404622" y="4859095"/>
+            <a:ext cx="6825996" cy="369332"/>
+          </a:xfrm>
+          <a:prstGeom prst="rect">
+            <a:avLst/>
+          </a:prstGeom>
+          <a:noFill/>
+        </p:spPr>
+        <p:txBody>
+          <a:bodyPr wrap="square">
+            <a:spAutoFit/>
+          </a:bodyPr>
+          <a:lstStyle/>
+          <a:p>
+            <a:r>
+              <a:rPr lang="en-US" dirty="0"/>
+              <a:t>Figure 4: Extracted information after resume parsing</a:t>
+            </a:r>
+            <a:endParaRPr lang="en-IN" dirty="0"/>
+          </a:p>
+        </p:txBody>
+      </p:sp>
+    </p:spTree>
+    <p:extLst>
+      <p:ext uri="{BB962C8B-B14F-4D97-AF65-F5344CB8AC3E}">
+        <p14:creationId xmlns:p14="http://schemas.microsoft.com/office/powerpoint/2010/main" val="4291171799"/>
+      </p:ext>
+    </p:extLst>
+  </p:cSld>
+  <p:clrMapOvr>
+    <a:masterClrMapping/>
+  </p:clrMapOvr>
+</p:sld>
+</file>
+
+<file path=ppt/slides/slide24.xml><?xml version="1.0" encoding="utf-8"?>
+<p:sld xmlns:a="http://schemas.openxmlformats.org/drawingml/2006/main" xmlns:r="http://schemas.openxmlformats.org/officeDocument/2006/relationships" xmlns:p="http://schemas.openxmlformats.org/presentationml/2006/main">
+  <p:cSld>
+    <p:spTree>
+      <p:nvGrpSpPr>
+        <p:cNvPr id="1" name=""/>
+        <p:cNvGrpSpPr/>
+        <p:nvPr/>
+      </p:nvGrpSpPr>
+      <p:grpSpPr>
+        <a:xfrm>
+          <a:off x="0" y="0"/>
+          <a:ext cx="0" cy="0"/>
+          <a:chOff x="0" y="0"/>
+          <a:chExt cx="0" cy="0"/>
+        </a:xfrm>
+      </p:grpSpPr>
+      <p:sp>
+        <p:nvSpPr>
           <p:cNvPr id="2" name="Title 1"/>
           <p:cNvSpPr>
             <a:spLocks noGrp="1"/>
@@ -8377,7 +8730,7 @@
 </p:sld>
 </file>
 
-<file path=ppt/slides/slide24.xml><?xml version="1.0" encoding="utf-8"?>
+<file path=ppt/slides/slide25.xml><?xml version="1.0" encoding="utf-8"?>
 <p:sld xmlns:a="http://schemas.openxmlformats.org/drawingml/2006/main" xmlns:r="http://schemas.openxmlformats.org/officeDocument/2006/relationships" xmlns:p="http://schemas.openxmlformats.org/presentationml/2006/main">
   <p:cSld>
     <p:spTree>
@@ -8532,7 +8885,7 @@
 </p:sld>
 </file>
 
-<file path=ppt/slides/slide25.xml><?xml version="1.0" encoding="utf-8"?>
+<file path=ppt/slides/slide26.xml><?xml version="1.0" encoding="utf-8"?>
 <p:sld xmlns:a="http://schemas.openxmlformats.org/drawingml/2006/main" xmlns:r="http://schemas.openxmlformats.org/officeDocument/2006/relationships" xmlns:p="http://schemas.openxmlformats.org/presentationml/2006/main">
   <p:cSld>
     <p:spTree>
@@ -8708,7 +9061,7 @@
 </p:sld>
 </file>
 
-<file path=ppt/slides/slide26.xml><?xml version="1.0" encoding="utf-8"?>
+<file path=ppt/slides/slide27.xml><?xml version="1.0" encoding="utf-8"?>
 <p:sld xmlns:a="http://schemas.openxmlformats.org/drawingml/2006/main" xmlns:r="http://schemas.openxmlformats.org/officeDocument/2006/relationships" xmlns:p="http://schemas.openxmlformats.org/presentationml/2006/main">
   <p:cSld>
     <p:spTree>
